--- a/lecons/LSA/Geomorphology/LSA_GEOMO_L02_Internal_Structure_of_the_Earth.pptx
+++ b/lecons/LSA/Geomorphology/LSA_GEOMO_L02_Internal_Structure_of_the_Earth.pptx
@@ -7029,7 +7029,7 @@
                 <a:ea typeface="Times New Roman" pitchFamily="34" charset="-122"/>
                 <a:cs typeface="Times New Roman" pitchFamily="34" charset="-120"/>
               </a:rPr>
-              <a:t>Lesson 2: Internal Structure of the Earth</a:t>
+              <a:t>Lesson 2</a:t>
             </a:r>
             <a:endParaRPr lang="en-US" sz="2600" dirty="0"/>
           </a:p>
